--- a/Organisation/NaPiRE Flyer.pptx
+++ b/Organisation/NaPiRE Flyer.pptx
@@ -244,7 +244,7 @@
           <a:p>
             <a:fld id="{7CBC377A-BB38-ED4B-8E48-D215F9485276}" type="datetimeFigureOut">
               <a:rPr lang="en-GB" smtClean="0"/>
-              <a:t>07/12/2024</a:t>
+              <a:t>11/12/2024</a:t>
             </a:fld>
             <a:endParaRPr lang="en-GB"/>
           </a:p>
@@ -414,7 +414,7 @@
           <a:p>
             <a:fld id="{7CBC377A-BB38-ED4B-8E48-D215F9485276}" type="datetimeFigureOut">
               <a:rPr lang="en-GB" smtClean="0"/>
-              <a:t>07/12/2024</a:t>
+              <a:t>11/12/2024</a:t>
             </a:fld>
             <a:endParaRPr lang="en-GB"/>
           </a:p>
@@ -594,7 +594,7 @@
           <a:p>
             <a:fld id="{7CBC377A-BB38-ED4B-8E48-D215F9485276}" type="datetimeFigureOut">
               <a:rPr lang="en-GB" smtClean="0"/>
-              <a:t>07/12/2024</a:t>
+              <a:t>11/12/2024</a:t>
             </a:fld>
             <a:endParaRPr lang="en-GB"/>
           </a:p>
@@ -764,7 +764,7 @@
           <a:p>
             <a:fld id="{7CBC377A-BB38-ED4B-8E48-D215F9485276}" type="datetimeFigureOut">
               <a:rPr lang="en-GB" smtClean="0"/>
-              <a:t>07/12/2024</a:t>
+              <a:t>11/12/2024</a:t>
             </a:fld>
             <a:endParaRPr lang="en-GB"/>
           </a:p>
@@ -1010,7 +1010,7 @@
           <a:p>
             <a:fld id="{7CBC377A-BB38-ED4B-8E48-D215F9485276}" type="datetimeFigureOut">
               <a:rPr lang="en-GB" smtClean="0"/>
-              <a:t>07/12/2024</a:t>
+              <a:t>11/12/2024</a:t>
             </a:fld>
             <a:endParaRPr lang="en-GB"/>
           </a:p>
@@ -1242,7 +1242,7 @@
           <a:p>
             <a:fld id="{7CBC377A-BB38-ED4B-8E48-D215F9485276}" type="datetimeFigureOut">
               <a:rPr lang="en-GB" smtClean="0"/>
-              <a:t>07/12/2024</a:t>
+              <a:t>11/12/2024</a:t>
             </a:fld>
             <a:endParaRPr lang="en-GB"/>
           </a:p>
@@ -1609,7 +1609,7 @@
           <a:p>
             <a:fld id="{7CBC377A-BB38-ED4B-8E48-D215F9485276}" type="datetimeFigureOut">
               <a:rPr lang="en-GB" smtClean="0"/>
-              <a:t>07/12/2024</a:t>
+              <a:t>11/12/2024</a:t>
             </a:fld>
             <a:endParaRPr lang="en-GB"/>
           </a:p>
@@ -1727,7 +1727,7 @@
           <a:p>
             <a:fld id="{7CBC377A-BB38-ED4B-8E48-D215F9485276}" type="datetimeFigureOut">
               <a:rPr lang="en-GB" smtClean="0"/>
-              <a:t>07/12/2024</a:t>
+              <a:t>11/12/2024</a:t>
             </a:fld>
             <a:endParaRPr lang="en-GB"/>
           </a:p>
@@ -1822,7 +1822,7 @@
           <a:p>
             <a:fld id="{7CBC377A-BB38-ED4B-8E48-D215F9485276}" type="datetimeFigureOut">
               <a:rPr lang="en-GB" smtClean="0"/>
-              <a:t>07/12/2024</a:t>
+              <a:t>11/12/2024</a:t>
             </a:fld>
             <a:endParaRPr lang="en-GB"/>
           </a:p>
@@ -2099,7 +2099,7 @@
           <a:p>
             <a:fld id="{7CBC377A-BB38-ED4B-8E48-D215F9485276}" type="datetimeFigureOut">
               <a:rPr lang="en-GB" smtClean="0"/>
-              <a:t>07/12/2024</a:t>
+              <a:t>11/12/2024</a:t>
             </a:fld>
             <a:endParaRPr lang="en-GB"/>
           </a:p>
@@ -2356,7 +2356,7 @@
           <a:p>
             <a:fld id="{7CBC377A-BB38-ED4B-8E48-D215F9485276}" type="datetimeFigureOut">
               <a:rPr lang="en-GB" smtClean="0"/>
-              <a:t>07/12/2024</a:t>
+              <a:t>11/12/2024</a:t>
             </a:fld>
             <a:endParaRPr lang="en-GB"/>
           </a:p>
@@ -2569,7 +2569,7 @@
           <a:p>
             <a:fld id="{7CBC377A-BB38-ED4B-8E48-D215F9485276}" type="datetimeFigureOut">
               <a:rPr lang="en-GB" smtClean="0"/>
-              <a:t>07/12/2024</a:t>
+              <a:t>11/12/2024</a:t>
             </a:fld>
             <a:endParaRPr lang="en-GB"/>
           </a:p>
@@ -2974,6 +2974,35 @@
           <a:chExt cx="0" cy="0"/>
         </a:xfrm>
       </p:grpSpPr>
+      <p:pic>
+        <p:nvPicPr>
+          <p:cNvPr id="3" name="Picture 2">
+            <a:extLst>
+              <a:ext uri="{FF2B5EF4-FFF2-40B4-BE49-F238E27FC236}">
+                <a16:creationId xmlns:a16="http://schemas.microsoft.com/office/drawing/2014/main" id="{398C986D-6D30-99E4-8B8B-6C14CA404E75}"/>
+              </a:ext>
+            </a:extLst>
+          </p:cNvPr>
+          <p:cNvPicPr>
+            <a:picLocks noChangeAspect="1"/>
+          </p:cNvPicPr>
+          <p:nvPr/>
+        </p:nvPicPr>
+        <p:blipFill>
+          <a:blip r:embed="rId2"/>
+          <a:srcRect l="9940" t="12983" r="816" b="10573"/>
+          <a:stretch/>
+        </p:blipFill>
+        <p:spPr>
+          <a:xfrm>
+            <a:off x="-79869" y="917473"/>
+            <a:ext cx="5491601" cy="6656765"/>
+          </a:xfrm>
+          <a:prstGeom prst="rect">
+            <a:avLst/>
+          </a:prstGeom>
+        </p:spPr>
+      </p:pic>
       <p:sp>
         <p:nvSpPr>
           <p:cNvPr id="10" name="Rectangle 9">
@@ -3121,36 +3150,6 @@
           </a:p>
         </p:txBody>
       </p:sp>
-      <p:pic>
-        <p:nvPicPr>
-          <p:cNvPr id="9" name="Picture 8">
-            <a:extLst>
-              <a:ext uri="{FF2B5EF4-FFF2-40B4-BE49-F238E27FC236}">
-                <a16:creationId xmlns:a16="http://schemas.microsoft.com/office/drawing/2014/main" id="{D9E37CCA-73D3-52E5-7F95-5384C040208F}"/>
-              </a:ext>
-            </a:extLst>
-          </p:cNvPr>
-          <p:cNvPicPr>
-            <a:picLocks noChangeAspect="1"/>
-          </p:cNvPicPr>
-          <p:nvPr/>
-        </p:nvPicPr>
-        <p:blipFill>
-          <a:blip r:embed="rId2"/>
-          <a:stretch>
-            <a:fillRect/>
-          </a:stretch>
-        </p:blipFill>
-        <p:spPr>
-          <a:xfrm>
-            <a:off x="-47728" y="917474"/>
-            <a:ext cx="5423105" cy="6820566"/>
-          </a:xfrm>
-          <a:prstGeom prst="rect">
-            <a:avLst/>
-          </a:prstGeom>
-        </p:spPr>
-      </p:pic>
       <p:sp>
         <p:nvSpPr>
           <p:cNvPr id="11" name="Rectangle 10">
@@ -3165,7 +3164,7 @@
         </p:nvSpPr>
         <p:spPr>
           <a:xfrm rot="1216291">
-            <a:off x="3802078" y="1961277"/>
+            <a:off x="3828205" y="1900314"/>
             <a:ext cx="1264714" cy="792534"/>
           </a:xfrm>
           <a:prstGeom prst="rect">

--- a/Organisation/NaPiRE Flyer.pptx
+++ b/Organisation/NaPiRE Flyer.pptx
@@ -244,7 +244,7 @@
           <a:p>
             <a:fld id="{7CBC377A-BB38-ED4B-8E48-D215F9485276}" type="datetimeFigureOut">
               <a:rPr lang="en-GB" smtClean="0"/>
-              <a:t>11/12/2024</a:t>
+              <a:t>17/03/2025</a:t>
             </a:fld>
             <a:endParaRPr lang="en-GB"/>
           </a:p>
@@ -414,7 +414,7 @@
           <a:p>
             <a:fld id="{7CBC377A-BB38-ED4B-8E48-D215F9485276}" type="datetimeFigureOut">
               <a:rPr lang="en-GB" smtClean="0"/>
-              <a:t>11/12/2024</a:t>
+              <a:t>17/03/2025</a:t>
             </a:fld>
             <a:endParaRPr lang="en-GB"/>
           </a:p>
@@ -594,7 +594,7 @@
           <a:p>
             <a:fld id="{7CBC377A-BB38-ED4B-8E48-D215F9485276}" type="datetimeFigureOut">
               <a:rPr lang="en-GB" smtClean="0"/>
-              <a:t>11/12/2024</a:t>
+              <a:t>17/03/2025</a:t>
             </a:fld>
             <a:endParaRPr lang="en-GB"/>
           </a:p>
@@ -764,7 +764,7 @@
           <a:p>
             <a:fld id="{7CBC377A-BB38-ED4B-8E48-D215F9485276}" type="datetimeFigureOut">
               <a:rPr lang="en-GB" smtClean="0"/>
-              <a:t>11/12/2024</a:t>
+              <a:t>17/03/2025</a:t>
             </a:fld>
             <a:endParaRPr lang="en-GB"/>
           </a:p>
@@ -1010,7 +1010,7 @@
           <a:p>
             <a:fld id="{7CBC377A-BB38-ED4B-8E48-D215F9485276}" type="datetimeFigureOut">
               <a:rPr lang="en-GB" smtClean="0"/>
-              <a:t>11/12/2024</a:t>
+              <a:t>17/03/2025</a:t>
             </a:fld>
             <a:endParaRPr lang="en-GB"/>
           </a:p>
@@ -1242,7 +1242,7 @@
           <a:p>
             <a:fld id="{7CBC377A-BB38-ED4B-8E48-D215F9485276}" type="datetimeFigureOut">
               <a:rPr lang="en-GB" smtClean="0"/>
-              <a:t>11/12/2024</a:t>
+              <a:t>17/03/2025</a:t>
             </a:fld>
             <a:endParaRPr lang="en-GB"/>
           </a:p>
@@ -1609,7 +1609,7 @@
           <a:p>
             <a:fld id="{7CBC377A-BB38-ED4B-8E48-D215F9485276}" type="datetimeFigureOut">
               <a:rPr lang="en-GB" smtClean="0"/>
-              <a:t>11/12/2024</a:t>
+              <a:t>17/03/2025</a:t>
             </a:fld>
             <a:endParaRPr lang="en-GB"/>
           </a:p>
@@ -1727,7 +1727,7 @@
           <a:p>
             <a:fld id="{7CBC377A-BB38-ED4B-8E48-D215F9485276}" type="datetimeFigureOut">
               <a:rPr lang="en-GB" smtClean="0"/>
-              <a:t>11/12/2024</a:t>
+              <a:t>17/03/2025</a:t>
             </a:fld>
             <a:endParaRPr lang="en-GB"/>
           </a:p>
@@ -1822,7 +1822,7 @@
           <a:p>
             <a:fld id="{7CBC377A-BB38-ED4B-8E48-D215F9485276}" type="datetimeFigureOut">
               <a:rPr lang="en-GB" smtClean="0"/>
-              <a:t>11/12/2024</a:t>
+              <a:t>17/03/2025</a:t>
             </a:fld>
             <a:endParaRPr lang="en-GB"/>
           </a:p>
@@ -2099,7 +2099,7 @@
           <a:p>
             <a:fld id="{7CBC377A-BB38-ED4B-8E48-D215F9485276}" type="datetimeFigureOut">
               <a:rPr lang="en-GB" smtClean="0"/>
-              <a:t>11/12/2024</a:t>
+              <a:t>17/03/2025</a:t>
             </a:fld>
             <a:endParaRPr lang="en-GB"/>
           </a:p>
@@ -2356,7 +2356,7 @@
           <a:p>
             <a:fld id="{7CBC377A-BB38-ED4B-8E48-D215F9485276}" type="datetimeFigureOut">
               <a:rPr lang="en-GB" smtClean="0"/>
-              <a:t>11/12/2024</a:t>
+              <a:t>17/03/2025</a:t>
             </a:fld>
             <a:endParaRPr lang="en-GB"/>
           </a:p>
@@ -2569,7 +2569,7 @@
           <a:p>
             <a:fld id="{7CBC377A-BB38-ED4B-8E48-D215F9485276}" type="datetimeFigureOut">
               <a:rPr lang="en-GB" smtClean="0"/>
-              <a:t>11/12/2024</a:t>
+              <a:t>17/03/2025</a:t>
             </a:fld>
             <a:endParaRPr lang="en-GB"/>
           </a:p>
@@ -3681,7 +3681,7 @@
                 </a:solidFill>
                 <a:latin typeface="Helvetica" pitchFamily="2" charset="0"/>
               </a:rPr>
-              <a:t>March 31, 2025</a:t>
+              <a:t>April 30, 2025</a:t>
             </a:r>
           </a:p>
         </p:txBody>
